--- a/tests/Lokad.OoxPdf.Tests/Cases/pptx-ladder-04-typography-dense-column-probe.pptx
+++ b/tests/Lokad.OoxPdf.Tests/Cases/pptx-ladder-04-typography-dense-column-probe.pptx
@@ -3386,7 +3386,7 @@
               <a:rPr sz="1300">
                 <a:latin typeface="Calibri"/>
               </a:rPr>
-              <a:t>DÃ©pendance, qualitÃ©, coÃ»t, dÃ©lai, Ã©cart: accented letters must not introduce phantom spacing.</a:t>
+              <a:t>Dépendance, qualité, coût, délai, écart: accented letters must not introduce phantom spacing.</a:t>
             </a:r>
           </a:p>
           <a:p>
